--- a/reports/kerala-sir-2026-deck.pptx
+++ b/reports/kerala-sir-2026-deck.pptx
@@ -2406,7 +2406,7 @@
           <a:p>
             <a:r>
               <a:rPr lang="en-US" dirty="0"/>
-              <a:t>No table of the names left off has been published. The deck measures the fall in the roll from January 2025, which takes in ordinary changes as well as the revision and is a different count from the names struck off.</a:t>
+              <a:t>The Special Intensive Revision (SIR) is the Election Commission's house-to-house recheck of the electoral roll, the list of people entitled to vote. No table of the names left off has been published. The deck measures the fall in the roll from January 2025, which takes in ordinary changes as well as the revision and is a different count from the names struck off.</a:t>
             </a:r>
             <a:endParaRPr lang="en-US" dirty="0"/>
           </a:p>
@@ -2494,7 +2494,7 @@
           <a:p>
             <a:r>
               <a:rPr lang="en-US" dirty="0"/>
-              <a:t/>
+              <a:t>Against own district is each seat's figure less its district's, averaged over the party's seats. A minus means a smaller fall than the district as a whole.</a:t>
             </a:r>
             <a:endParaRPr lang="en-US" dirty="0"/>
           </a:p>
@@ -3022,7 +3022,7 @@
           <a:p>
             <a:r>
               <a:rPr lang="en-US" dirty="0"/>
-              <a:t/>
+              <a:t>The fall in the roll is the January 2025 roll less a later one, so it counts names removed less names added, ordinary deaths and moves included. Per 100 electors is that fall for every 100 people on the January 2025 roll. The winning margin is the winner's votes less the runner-up's.</a:t>
             </a:r>
             <a:endParaRPr lang="en-US" dirty="0"/>
           </a:p>
@@ -3462,7 +3462,7 @@
           <a:p>
             <a:r>
               <a:rPr lang="en-US" dirty="0"/>
-              <a:t>Over the margin means large enough to decide a seat, and says nothing about whether the fall did. Nobody can know how anyone missing from the roll would have voted.</a:t>
+              <a:t>Over the margin means large enough to decide a seat, and says nothing about whether the fall did. Nobody can know how anyone missing from the roll would have voted. A rank correlation runs from -1 to 1 and measures how far two orderings agree.</a:t>
             </a:r>
             <a:endParaRPr lang="en-US" dirty="0"/>
           </a:p>
@@ -10800,7 +10800,7 @@
       </p:graphicFrame>
       <p:sp>
         <p:nvSpPr>
-          <p:cNvPr id="48" name="Text 45"/>
+          <p:cNvPr id="49" name="Text 45"/>
           <p:cNvSpPr txBox="1"/>
           <p:nvPr/>
         </p:nvSpPr>

--- a/reports/kerala-sir-2026-deck.pptx
+++ b/reports/kerala-sir-2026-deck.pptx
@@ -390,46 +390,46 @@
                 <c:formatCode>General</c:formatCode>
                 <c:ptCount val="14"/>
                 <c:pt idx="0">
-                  <c:v>14</c:v>
+                  <c:v>14.0049</c:v>
                 </c:pt>
                 <c:pt idx="1">
-                  <c:v>13.17</c:v>
+                  <c:v>13.1674</c:v>
                 </c:pt>
                 <c:pt idx="2">
-                  <c:v>11.65</c:v>
+                  <c:v>11.6547</c:v>
                 </c:pt>
                 <c:pt idx="3">
-                  <c:v>10.18</c:v>
+                  <c:v>10.1769</c:v>
                 </c:pt>
                 <c:pt idx="4">
-                  <c:v>9.77</c:v>
+                  <c:v>9.7709</c:v>
                 </c:pt>
                 <c:pt idx="5">
-                  <c:v>9.7</c:v>
+                  <c:v>9.7032</c:v>
                 </c:pt>
                 <c:pt idx="6">
-                  <c:v>7.84</c:v>
+                  <c:v>7.8444</c:v>
                 </c:pt>
                 <c:pt idx="7">
-                  <c:v>7.81</c:v>
+                  <c:v>7.8061</c:v>
                 </c:pt>
                 <c:pt idx="8">
-                  <c:v>7.31</c:v>
+                  <c:v>7.3114</c:v>
                 </c:pt>
                 <c:pt idx="9">
-                  <c:v>6.96</c:v>
+                  <c:v>6.9572</c:v>
                 </c:pt>
                 <c:pt idx="10">
-                  <c:v>5.87</c:v>
+                  <c:v>5.8725</c:v>
                 </c:pt>
                 <c:pt idx="11">
-                  <c:v>5.14</c:v>
+                  <c:v>5.1354</c:v>
                 </c:pt>
                 <c:pt idx="12">
-                  <c:v>4.8</c:v>
+                  <c:v>4.7956</c:v>
                 </c:pt>
                 <c:pt idx="13">
-                  <c:v>4.67</c:v>
+                  <c:v>4.6727</c:v>
                 </c:pt>
               </c:numCache>
             </c:numRef>
@@ -696,46 +696,46 @@
                 <c:formatCode>General</c:formatCode>
                 <c:ptCount val="14"/>
                 <c:pt idx="0">
-                  <c:v>52.5</c:v>
+                  <c:v>52.5048</c:v>
                 </c:pt>
                 <c:pt idx="1">
-                  <c:v>50.9</c:v>
+                  <c:v>50.9006</c:v>
                 </c:pt>
                 <c:pt idx="2">
-                  <c:v>51.37</c:v>
+                  <c:v>51.3653</c:v>
                 </c:pt>
                 <c:pt idx="3">
-                  <c:v>52.24</c:v>
+                  <c:v>52.2353</c:v>
                 </c:pt>
                 <c:pt idx="4">
-                  <c:v>52.65</c:v>
+                  <c:v>52.6544</c:v>
                 </c:pt>
                 <c:pt idx="5">
-                  <c:v>51.51</c:v>
+                  <c:v>51.5097</c:v>
                 </c:pt>
                 <c:pt idx="6">
-                  <c:v>52.19</c:v>
+                  <c:v>52.1892</c:v>
                 </c:pt>
                 <c:pt idx="7">
-                  <c:v>51.17</c:v>
+                  <c:v>51.1746</c:v>
                 </c:pt>
                 <c:pt idx="8">
-                  <c:v>52.44</c:v>
+                  <c:v>52.4376</c:v>
                 </c:pt>
                 <c:pt idx="9">
-                  <c:v>51.64</c:v>
+                  <c:v>51.6359</c:v>
                 </c:pt>
                 <c:pt idx="10">
-                  <c:v>51.16</c:v>
+                  <c:v>51.1554</c:v>
                 </c:pt>
                 <c:pt idx="11">
-                  <c:v>51.13</c:v>
+                  <c:v>51.1339</c:v>
                 </c:pt>
                 <c:pt idx="12">
-                  <c:v>50</c:v>
+                  <c:v>50.0035</c:v>
                 </c:pt>
                 <c:pt idx="13">
-                  <c:v>52.62</c:v>
+                  <c:v>52.6231</c:v>
                 </c:pt>
               </c:numCache>
             </c:numRef>
@@ -845,46 +845,46 @@
                 <c:formatCode>General</c:formatCode>
                 <c:ptCount val="14"/>
                 <c:pt idx="0">
-                  <c:v>53.3</c:v>
+                  <c:v>53.297</c:v>
                 </c:pt>
                 <c:pt idx="1">
-                  <c:v>53.56</c:v>
+                  <c:v>53.5602</c:v>
                 </c:pt>
                 <c:pt idx="2">
-                  <c:v>53.18</c:v>
+                  <c:v>53.1768</c:v>
                 </c:pt>
                 <c:pt idx="3">
-                  <c:v>57.63</c:v>
+                  <c:v>57.6271</c:v>
                 </c:pt>
                 <c:pt idx="4">
-                  <c:v>56.75</c:v>
+                  <c:v>56.7476</c:v>
                 </c:pt>
                 <c:pt idx="5">
-                  <c:v>54.31</c:v>
+                  <c:v>54.3148</c:v>
                 </c:pt>
                 <c:pt idx="6">
-                  <c:v>56.65</c:v>
+                  <c:v>56.6463</c:v>
                 </c:pt>
                 <c:pt idx="7">
-                  <c:v>55.7</c:v>
+                  <c:v>55.7018</c:v>
                 </c:pt>
                 <c:pt idx="8">
-                  <c:v>54.38</c:v>
+                  <c:v>54.3795</c:v>
                 </c:pt>
                 <c:pt idx="9">
-                  <c:v>56.47</c:v>
+                  <c:v>56.4727</c:v>
                 </c:pt>
                 <c:pt idx="10">
-                  <c:v>53.22</c:v>
+                  <c:v>53.2204</c:v>
                 </c:pt>
                 <c:pt idx="11">
-                  <c:v>58.43</c:v>
+                  <c:v>58.4348</c:v>
                 </c:pt>
                 <c:pt idx="12">
-                  <c:v>59.92</c:v>
+                  <c:v>59.9185</c:v>
                 </c:pt>
                 <c:pt idx="13">
-                  <c:v>54.27</c:v>
+                  <c:v>54.2749</c:v>
                 </c:pt>
               </c:numCache>
             </c:numRef>
@@ -1483,7 +1483,7 @@
                   <c:v>6.9</c:v>
                 </c:pt>
                 <c:pt idx="5">
-                  <c:v>5.8</c:v>
+                  <c:v>5.9</c:v>
                 </c:pt>
                 <c:pt idx="6">
                   <c:v>4.1</c:v>
@@ -1492,7 +1492,7 @@
                   <c:v>2.3</c:v>
                 </c:pt>
                 <c:pt idx="8">
-                  <c:v>2.5</c:v>
+                  <c:v>2.4</c:v>
                 </c:pt>
                 <c:pt idx="9">
                   <c:v>-0.4</c:v>
@@ -5396,7 +5396,7 @@
                 <a:ea typeface="Cambria" pitchFamily="34" charset="-122"/>
                 <a:cs typeface="Cambria" pitchFamily="34" charset="-120"/>
               </a:rPr>
-              <a:t>INC seats lost 9.4 per 100 at the draft and CPI(M) seats 7.8, and against their own districts they differ by 1.4 points</a:t>
+              <a:t>INC seats lost 9.4 per 100 at the draft and CPI(M) seats 7.8, and against their own districts they differ by 1.5 points</a:t>
             </a:r>
             <a:endParaRPr lang="en-US" sz="2700" dirty="0"/>
           </a:p>
@@ -7938,7 +7938,7 @@
                           <a:ea typeface="Calibri" pitchFamily="34" charset="-122"/>
                           <a:cs typeface="Calibri" pitchFamily="34" charset="-120"/>
                         </a:rPr>
-                        <a:t>-0.7</a:t>
+                        <a:t>-0.6</a:t>
                       </a:r>
                       <a:endParaRPr lang="en-US" sz="1200" dirty="0">
                         <a:latin typeface="Calibri" charset="0"/>
@@ -8622,7 +8622,7 @@
                           <a:ea typeface="Calibri" pitchFamily="34" charset="-122"/>
                           <a:cs typeface="Calibri" pitchFamily="34" charset="-120"/>
                         </a:rPr>
-                        <a:t>-0.3</a:t>
+                        <a:t>-0.2</a:t>
                       </a:r>
                       <a:endParaRPr lang="en-US" sz="1200" dirty="0">
                         <a:latin typeface="Calibri" charset="0"/>

--- a/reports/kerala-sir-2026-deck.pptx
+++ b/reports/kerala-sir-2026-deck.pptx
@@ -4491,7 +4491,7 @@
                 <a:ea typeface="Calibri" pitchFamily="34" charset="-122"/>
                 <a:cs typeface="Calibri" pitchFamily="34" charset="-120"/>
               </a:rPr>
-              <a:t>PinPoint Ventures</a:t>
+              <a:t>ImpactMojo</a:t>
             </a:r>
             <a:endParaRPr lang="en-US" sz="1300" dirty="0"/>
           </a:p>
@@ -5474,7 +5474,7 @@
                 <a:ea typeface="Calibri" pitchFamily="34" charset="-122"/>
                 <a:cs typeface="Calibri" pitchFamily="34" charset="-120"/>
               </a:rPr>
-              <a:t>Kerala SIR 2026 · PinPoint Ventures · totals only, never names or EPIC numbers</a:t>
+              <a:t>Kerala SIR 2026 · ImpactMojo · totals only, never names or EPIC numbers</a:t>
             </a:r>
             <a:endParaRPr lang="en-US" sz="900" dirty="0"/>
           </a:p>
@@ -11023,7 +11023,7 @@
                 <a:ea typeface="Calibri" pitchFamily="34" charset="-122"/>
                 <a:cs typeface="Calibri" pitchFamily="34" charset="-120"/>
               </a:rPr>
-              <a:t>Kerala SIR 2026 · PinPoint Ventures · totals only, never names or EPIC numbers</a:t>
+              <a:t>Kerala SIR 2026 · ImpactMojo · totals only, never names or EPIC numbers</a:t>
             </a:r>
             <a:endParaRPr lang="en-US" sz="900" dirty="0"/>
           </a:p>
@@ -12176,7 +12176,7 @@
                 <a:ea typeface="Calibri" pitchFamily="34" charset="-122"/>
                 <a:cs typeface="Calibri" pitchFamily="34" charset="-120"/>
               </a:rPr>
-              <a:t>Kerala SIR 2026 · PinPoint Ventures · totals only, never names or EPIC numbers</a:t>
+              <a:t>Kerala SIR 2026 · ImpactMojo · totals only, never names or EPIC numbers</a:t>
             </a:r>
             <a:endParaRPr lang="en-US" sz="900" dirty="0"/>
           </a:p>
@@ -13271,7 +13271,7 @@
                 <a:ea typeface="Calibri" pitchFamily="34" charset="-122"/>
                 <a:cs typeface="Calibri" pitchFamily="34" charset="-120"/>
               </a:rPr>
-              <a:t>Kerala SIR 2026 · PinPoint Ventures · totals only, never names or EPIC numbers</a:t>
+              <a:t>Kerala SIR 2026 · ImpactMojo · totals only, never names or EPIC numbers</a:t>
             </a:r>
             <a:endParaRPr lang="en-US" sz="900" dirty="0"/>
           </a:p>
@@ -14351,7 +14351,7 @@
                 <a:ea typeface="Calibri" pitchFamily="34" charset="-122"/>
                 <a:cs typeface="Calibri" pitchFamily="34" charset="-120"/>
               </a:rPr>
-              <a:t>PinPoint Ventures</a:t>
+              <a:t>ImpactMojo</a:t>
             </a:r>
             <a:endParaRPr lang="en-US" sz="1700" dirty="0"/>
           </a:p>
@@ -16422,7 +16422,7 @@
                 <a:ea typeface="Calibri" pitchFamily="34" charset="-122"/>
                 <a:cs typeface="Calibri" pitchFamily="34" charset="-120"/>
               </a:rPr>
-              <a:t>Kerala SIR 2026 · PinPoint Ventures · totals only, never names or EPIC numbers</a:t>
+              <a:t>Kerala SIR 2026 · ImpactMojo · totals only, never names or EPIC numbers</a:t>
             </a:r>
             <a:endParaRPr lang="en-US" sz="900" dirty="0"/>
           </a:p>
@@ -17622,7 +17622,7 @@
                 <a:ea typeface="Calibri" pitchFamily="34" charset="-122"/>
                 <a:cs typeface="Calibri" pitchFamily="34" charset="-120"/>
               </a:rPr>
-              <a:t>Kerala SIR 2026 · PinPoint Ventures · totals only, never names or EPIC numbers</a:t>
+              <a:t>Kerala SIR 2026 · ImpactMojo · totals only, never names or EPIC numbers</a:t>
             </a:r>
             <a:endParaRPr lang="en-US" sz="900" dirty="0"/>
           </a:p>
@@ -19381,7 +19381,7 @@
                 <a:ea typeface="Calibri" pitchFamily="34" charset="-122"/>
                 <a:cs typeface="Calibri" pitchFamily="34" charset="-120"/>
               </a:rPr>
-              <a:t>Kerala SIR 2026 · PinPoint Ventures · totals only, never names or EPIC numbers</a:t>
+              <a:t>Kerala SIR 2026 · ImpactMojo · totals only, never names or EPIC numbers</a:t>
             </a:r>
             <a:endParaRPr lang="en-US" sz="900" dirty="0"/>
           </a:p>
@@ -20506,7 +20506,7 @@
                 <a:ea typeface="Calibri" pitchFamily="34" charset="-122"/>
                 <a:cs typeface="Calibri" pitchFamily="34" charset="-120"/>
               </a:rPr>
-              <a:t>Kerala SIR 2026 · PinPoint Ventures · totals only, never names or EPIC numbers</a:t>
+              <a:t>Kerala SIR 2026 · ImpactMojo · totals only, never names or EPIC numbers</a:t>
             </a:r>
             <a:endParaRPr lang="en-US" sz="900" dirty="0"/>
           </a:p>
@@ -21610,7 +21610,7 @@
                 <a:ea typeface="Calibri" pitchFamily="34" charset="-122"/>
                 <a:cs typeface="Calibri" pitchFamily="34" charset="-120"/>
               </a:rPr>
-              <a:t>Kerala SIR 2026 · PinPoint Ventures · totals only, never names or EPIC numbers</a:t>
+              <a:t>Kerala SIR 2026 · ImpactMojo · totals only, never names or EPIC numbers</a:t>
             </a:r>
             <a:endParaRPr lang="en-US" sz="900" dirty="0"/>
           </a:p>
@@ -22735,7 +22735,7 @@
                 <a:ea typeface="Calibri" pitchFamily="34" charset="-122"/>
                 <a:cs typeface="Calibri" pitchFamily="34" charset="-120"/>
               </a:rPr>
-              <a:t>Kerala SIR 2026 · PinPoint Ventures · totals only, never names or EPIC numbers</a:t>
+              <a:t>Kerala SIR 2026 · ImpactMojo · totals only, never names or EPIC numbers</a:t>
             </a:r>
             <a:endParaRPr lang="en-US" sz="900" dirty="0"/>
           </a:p>
@@ -23839,7 +23839,7 @@
                 <a:ea typeface="Calibri" pitchFamily="34" charset="-122"/>
                 <a:cs typeface="Calibri" pitchFamily="34" charset="-120"/>
               </a:rPr>
-              <a:t>Kerala SIR 2026 · PinPoint Ventures · totals only, never names or EPIC numbers</a:t>
+              <a:t>Kerala SIR 2026 · ImpactMojo · totals only, never names or EPIC numbers</a:t>
             </a:r>
             <a:endParaRPr lang="en-US" sz="900" dirty="0"/>
           </a:p>

--- a/reports/kerala-sir-2026-deck.pptx
+++ b/reports/kerala-sir-2026-deck.pptx
@@ -2406,7 +2406,7 @@
           <a:p>
             <a:r>
               <a:rPr lang="en-US" dirty="0"/>
-              <a:t>The Special Intensive Revision (SIR) is the Election Commission's house-to-house recheck of the electoral roll, the list of people entitled to vote. No table of the names left off has been published. The deck measures the fall in the roll from January 2025, which takes in ordinary changes as well as the revision and is a different count from the names struck off.</a:t>
+              <a:t>The Special Intensive Revision (SIR) is the Election Commission's house-to-house recheck of the electoral roll, the list of people entitled to vote. No table of the names left off has been published. The deck measures the fall in the roll from January 2025, which takes in ordinary changes as well as the revision and is a different count from the names left off the draft.</a:t>
             </a:r>
             <a:endParaRPr lang="en-US" dirty="0"/>
           </a:p>
@@ -3022,7 +3022,7 @@
           <a:p>
             <a:r>
               <a:rPr lang="en-US" dirty="0"/>
-              <a:t>The fall in the roll is the January 2025 roll less a later one, so it counts names removed less names added, ordinary deaths and moves included. Per 100 electors is that fall for every 100 people on the January 2025 roll. The winning margin is the winner's votes less the runner-up's.</a:t>
+              <a:t>The fall in the roll is the January 2025 roll less a later one, so it counts names left off or deleted less names added, ordinary deaths and moves included. Per 100 electors is that fall for every 100 people on the January 2025 roll. The winning margin is the winner's votes less the runner-up's.</a:t>
             </a:r>
             <a:endParaRPr lang="en-US" dirty="0"/>
           </a:p>
@@ -11988,7 +11988,7 @@
                 <a:ea typeface="Calibri" pitchFamily="34" charset="-122"/>
                 <a:cs typeface="Calibri" pitchFamily="34" charset="-120"/>
               </a:rPr>
-              <a:t>How many names were removed in each place, or on what reason, because no table of the names left off has been published. How many of those left off were put back. How anyone missing from the roll would have voted.</a:t>
+              <a:t>How many names were left off in each place, or on what reason, because no table of the names left off has been published. How many of those left off were put back. How anyone missing from the roll would have voted.</a:t>
             </a:r>
             <a:endParaRPr lang="en-US" sz="1500" dirty="0"/>
           </a:p>
@@ -12032,7 +12032,7 @@
                 <a:ea typeface="Calibri" pitchFamily="34" charset="-122"/>
                 <a:cs typeface="Calibri" pitchFamily="34" charset="-120"/>
               </a:rPr>
-              <a:t>No list of removals can show intent, and the fall in the roll is a different count from the names struck off.</a:t>
+              <a:t>No list of names left off can show intent, and the fall in the roll is a different count from the names left off the draft.</a:t>
             </a:r>
             <a:endParaRPr lang="en-US" sz="1600" dirty="0"/>
           </a:p>
@@ -17439,7 +17439,7 @@
                 <a:ea typeface="Calibri" pitchFamily="34" charset="-122"/>
                 <a:cs typeface="Calibri" pitchFamily="34" charset="-120"/>
               </a:rPr>
-              <a:t>No count of the names removed has been published, so these are falls in the roll, which take in ordinary changes too.</a:t>
+              <a:t>No count of the names left off the draft has been published, so these are falls in the roll, which take in ordinary changes too.</a:t>
             </a:r>
             <a:endParaRPr lang="en-US" sz="1200" dirty="0"/>
           </a:p>
